--- a/domain-seminars/week11_area_level_resources.pptx
+++ b/domain-seminars/week11_area_level_resources.pptx
@@ -506,7 +506,7 @@
           <a:lstStyle/>
           <a:p>
             <a:r>
-              <a:t>Domain seminar for week 11: Area-Level Resources and Community Health. It follows the course pattern: basics and terminology, where the topic sits in industry and policy, reform goals, how analytics is deployed, and how analytics drives decisions. Replace this note with your own opening remarks.</a:t>
+              <a:t>Domain seminar for week 11: Area Level Resources and Spatial Analytics. It follows the course pattern: basics and terminology, where the topic sits in industry and policy, reform goals, how analytics is deployed, and how analytics drives decisions. Replace this note with your own opening remarks.</a:t>
             </a:r>
           </a:p>
         </p:txBody>
@@ -1506,7 +1506,7 @@
 </p:sldMaster>
 </file>
 
-<file path=ppt/slides/slide11.xml><?xml version="1.0" encoding="utf-8"?>
+<file path=ppt/slides/slide1.xml><?xml version="1.0" encoding="utf-8"?>
 <p:sld xmlns:a="http://schemas.openxmlformats.org/drawingml/2006/main" xmlns:p="http://schemas.openxmlformats.org/presentationml/2006/main" xmlns:r="http://schemas.openxmlformats.org/officeDocument/2006/relationships">
   <p:cSld>
     <p:spTree>
@@ -1548,7 +1548,7 @@
                   <a:srgbClr val="FFFFFF"/>
                 </a:solidFill>
               </a:rPr>
-              <a:t>Area-Level Resources and Community Health</a:t>
+              <a:t>Area Level Resources and Spatial Analytics</a:t>
             </a:r>
             <a:endParaRPr lang="en-US" sz="4000" dirty="0"/>
           </a:p>
@@ -1600,7 +1600,7 @@
 </p:sld>
 </file>
 
-<file path=ppt/slides/slide12.xml><?xml version="1.0" encoding="utf-8"?>
+<file path=ppt/slides/slide2.xml><?xml version="1.0" encoding="utf-8"?>
 <p:sld xmlns:a="http://schemas.openxmlformats.org/drawingml/2006/main" xmlns:p="http://schemas.openxmlformats.org/presentationml/2006/main" xmlns:r="http://schemas.openxmlformats.org/officeDocument/2006/relationships">
   <p:cSld>
     <p:spTree>
@@ -1797,7 +1797,7 @@
 </p:sld>
 </file>
 
-<file path=ppt/slides/slide13.xml><?xml version="1.0" encoding="utf-8"?>
+<file path=ppt/slides/slide3.xml><?xml version="1.0" encoding="utf-8"?>
 <p:sld xmlns:a="http://schemas.openxmlformats.org/drawingml/2006/main" xmlns:p="http://schemas.openxmlformats.org/presentationml/2006/main" xmlns:r="http://schemas.openxmlformats.org/officeDocument/2006/relationships">
   <p:cSld>
     <p:spTree>
@@ -1994,7 +1994,7 @@
 </p:sld>
 </file>
 
-<file path=ppt/slides/slide14.xml><?xml version="1.0" encoding="utf-8"?>
+<file path=ppt/slides/slide4.xml><?xml version="1.0" encoding="utf-8"?>
 <p:sld xmlns:a="http://schemas.openxmlformats.org/drawingml/2006/main" xmlns:p="http://schemas.openxmlformats.org/presentationml/2006/main" xmlns:r="http://schemas.openxmlformats.org/officeDocument/2006/relationships">
   <p:cSld>
     <p:spTree>
@@ -2191,7 +2191,7 @@
 </p:sld>
 </file>
 
-<file path=ppt/slides/slide15.xml><?xml version="1.0" encoding="utf-8"?>
+<file path=ppt/slides/slide5.xml><?xml version="1.0" encoding="utf-8"?>
 <p:sld xmlns:a="http://schemas.openxmlformats.org/drawingml/2006/main" xmlns:p="http://schemas.openxmlformats.org/presentationml/2006/main" xmlns:r="http://schemas.openxmlformats.org/officeDocument/2006/relationships">
   <p:cSld>
     <p:spTree>
@@ -2388,7 +2388,7 @@
 </p:sld>
 </file>
 
-<file path=ppt/slides/slide16.xml><?xml version="1.0" encoding="utf-8"?>
+<file path=ppt/slides/slide6.xml><?xml version="1.0" encoding="utf-8"?>
 <p:sld xmlns:a="http://schemas.openxmlformats.org/drawingml/2006/main" xmlns:p="http://schemas.openxmlformats.org/presentationml/2006/main" xmlns:r="http://schemas.openxmlformats.org/officeDocument/2006/relationships">
   <p:cSld>
     <p:spTree>

--- a/domain-seminars/week11_area_level_resources.pptx
+++ b/domain-seminars/week11_area_level_resources.pptx
@@ -506,7 +506,7 @@
           <a:lstStyle/>
           <a:p>
             <a:r>
-              <a:t>Domain seminar for week 11: Area Level Resources and Spatial Analytics. It follows the course pattern: basics and terminology, where the topic sits in industry and policy, reform goals, how analytics is deployed, and how analytics drives decisions. Replace this note with your own opening remarks.</a:t>
+              <a:t>Domain seminar for week 11: Area Level Resources and Spatial Analytics. We will go through basics and terminology, where the topic is found across industry and policy, reform goals, how analytics is deployed, and how analytics drives decisions. Provide opening remarks here.</a:t>
             </a:r>
           </a:p>
         </p:txBody>

--- a/domain-seminars/week11_area_level_resources.pptx
+++ b/domain-seminars/week11_area_level_resources.pptx
@@ -11,6 +11,7 @@
     <p:sldId id="269" r:id="rId20"/>
     <p:sldId id="270" r:id="rId21"/>
     <p:sldId id="271" r:id="rId22"/>
+    <p:sldId id="272" r:id="rId11"/>
   </p:sldIdLst>
   <p:notesMasterIdLst>
     <p:notesMasterId r:id="rId12"/>
@@ -857,6 +858,76 @@
           <a:p>
             <a:r>
               <a:t>A small zip code can have a high rate and only a handful of events. Impact depends on both the rate and the number of people. Places that do worse than their measured resources predict often have a local story worth investigating before committing a clinic.</a:t>
+            </a:r>
+          </a:p>
+        </p:txBody>
+      </p:sp>
+      <p:sp>
+        <p:nvSpPr>
+          <p:cNvPr id="4" name="Slide Number Placeholder 3"/>
+          <p:cNvSpPr>
+            <a:spLocks noGrp="1"/>
+          </p:cNvSpPr>
+          <p:nvPr>
+            <p:ph type="sldNum" idx="5" sz="quarter"/>
+          </p:nvPr>
+        </p:nvSpPr>
+        <p:spPr/>
+      </p:sp>
+    </p:spTree>
+  </p:cSld>
+  <p:clrMapOvr>
+    <a:masterClrMapping/>
+  </p:clrMapOvr>
+</p:notes>
+</file>
+
+<file path=ppt/notesSlides/notesSlide7.xml><?xml version="1.0" encoding="utf-8"?>
+<p:notes xmlns:a="http://schemas.openxmlformats.org/drawingml/2006/main" xmlns:p="http://schemas.openxmlformats.org/presentationml/2006/main" xmlns:r="http://schemas.openxmlformats.org/officeDocument/2006/relationships">
+  <p:cSld>
+    <p:spTree>
+      <p:nvGrpSpPr>
+        <p:cNvPr id="1" name=""/>
+        <p:cNvGrpSpPr/>
+        <p:nvPr/>
+      </p:nvGrpSpPr>
+      <p:grpSpPr>
+        <a:xfrm>
+          <a:off x="0" y="0"/>
+          <a:ext cx="0" cy="0"/>
+          <a:chOff x="0" y="0"/>
+          <a:chExt cx="0" cy="0"/>
+        </a:xfrm>
+      </p:grpSpPr>
+      <p:sp>
+        <p:nvSpPr>
+          <p:cNvPr id="2" name="Slide Image Placeholder 1"/>
+          <p:cNvSpPr>
+            <a:spLocks noGrp="1"/>
+          </p:cNvSpPr>
+          <p:nvPr>
+            <p:ph type="sldImg" idx="2"/>
+          </p:nvPr>
+        </p:nvSpPr>
+        <p:spPr/>
+      </p:sp>
+      <p:sp>
+        <p:nvSpPr>
+          <p:cNvPr id="3" name="Notes Placeholder 2"/>
+          <p:cNvSpPr>
+            <a:spLocks noGrp="1"/>
+          </p:cNvSpPr>
+          <p:nvPr>
+            <p:ph type="body" idx="3" sz="quarter"/>
+          </p:nvPr>
+        </p:nvSpPr>
+        <p:spPr/>
+        <p:txBody>
+          <a:bodyPr/>
+          <a:lstStyle/>
+          <a:p>
+            <a:r>
+              <a:t>Give students a few minutes to write an answer drawn from their own experience and career, then ask two or three to share. Connect their examples back to this seminar's content. In an online section, post the same question to the discussion board.</a:t>
             </a:r>
           </a:p>
         </p:txBody>
@@ -2572,6 +2643,167 @@
             <a:fld id="{F7021451-1387-4CA6-816F-3879F97B5CBC}" type="slidenum">
               <a:rPr b="0" lang="en-US"/>
               <a:t>6</a:t>
+            </a:fld>
+            <a:endParaRPr lang="en-US"/>
+          </a:p>
+        </p:txBody>
+      </p:sp>
+    </p:spTree>
+  </p:cSld>
+  <p:clrMapOvr>
+    <a:masterClrMapping/>
+  </p:clrMapOvr>
+</p:sld>
+</file>
+
+<file path=ppt/slides/slide7.xml><?xml version="1.0" encoding="utf-8"?>
+<p:sld xmlns:a="http://schemas.openxmlformats.org/drawingml/2006/main" xmlns:p="http://schemas.openxmlformats.org/presentationml/2006/main" xmlns:r="http://schemas.openxmlformats.org/officeDocument/2006/relationships">
+  <p:cSld>
+    <p:spTree>
+      <p:nvGrpSpPr>
+        <p:cNvPr id="1" name=""/>
+        <p:cNvGrpSpPr/>
+        <p:nvPr/>
+      </p:nvGrpSpPr>
+      <p:grpSpPr/>
+      <p:sp>
+        <p:nvSpPr>
+          <p:cNvPr id="2" name="Text 0"/>
+          <p:cNvSpPr/>
+          <p:nvPr>
+            <p:ph idx="100" type="title" hasCustomPrompt="1"/>
+          </p:nvPr>
+        </p:nvSpPr>
+        <p:spPr>
+          <a:xfrm>
+            <a:off x="731520" y="457200"/>
+            <a:ext cx="10698480" cy="822960"/>
+          </a:xfrm>
+          <a:prstGeom prst="rect">
+            <a:avLst/>
+          </a:prstGeom>
+          <a:noFill/>
+          <a:ln/>
+        </p:spPr>
+        <p:txBody>
+          <a:bodyPr wrap="square" lIns="0" tIns="0" rIns="0" bIns="0" rtlCol="0" anchor="t"/>
+          <a:lstStyle/>
+          <a:p>
+            <a:pPr algn="l" indent="0" marL="0">
+              <a:buNone/>
+            </a:pPr>
+            <a:r>
+              <a:rPr lang="en-US" sz="3200" b="1" dirty="0">
+                <a:solidFill>
+                  <a:srgbClr val="FFFFFF"/>
+                </a:solidFill>
+              </a:rPr>
+              <a:t>Discussion</a:t>
+            </a:r>
+            <a:endParaRPr lang="en-US" sz="3200" dirty="0"/>
+          </a:p>
+        </p:txBody>
+      </p:sp>
+      <p:sp>
+        <p:nvSpPr>
+          <p:cNvPr id="3" name="Text 0"/>
+          <p:cNvSpPr/>
+          <p:nvPr>
+            <p:ph idx="101" type="body" hasCustomPrompt="1"/>
+          </p:nvPr>
+        </p:nvSpPr>
+        <p:spPr>
+          <a:xfrm>
+            <a:off x="731520" y="1554480"/>
+            <a:ext cx="10698480" cy="4754880"/>
+          </a:xfrm>
+          <a:prstGeom prst="rect">
+            <a:avLst/>
+          </a:prstGeom>
+          <a:noFill/>
+          <a:ln/>
+        </p:spPr>
+        <p:txBody>
+          <a:bodyPr wrap="square" rtlCol="0" anchor="t"/>
+          <a:lstStyle/>
+          <a:p>
+            <a:pPr algn="l" marL="342900" indent="-342900">
+              <a:spcAft>
+                <a:spcPts val="1000"/>
+              </a:spcAft>
+              <a:buSzPct val="100000"/>
+              <a:buChar char="•"/>
+            </a:pPr>
+            <a:r>
+              <a:rPr lang="en-US" sz="2400" dirty="0">
+                <a:solidFill>
+                  <a:srgbClr val="FFFFFF"/>
+                </a:solidFill>
+              </a:rPr>
+              <a:t>Which community near you faces the biggest barriers to care, and what one resource would you place there, backed by what data?</a:t>
+            </a:r>
+            <a:endParaRPr lang="en-US" sz="2400" dirty="0"/>
+          </a:p>
+          <a:p>
+            <a:pPr algn="l" marL="342900" indent="-342900">
+              <a:spcAft>
+                <a:spcPts val="1000"/>
+              </a:spcAft>
+              <a:buSzPct val="100000"/>
+              <a:buChar char="•"/>
+            </a:pPr>
+            <a:r>
+              <a:rPr lang="en-US" sz="2400" dirty="0">
+                <a:solidFill>
+                  <a:srgbClr val="FFFFFF"/>
+                </a:solidFill>
+              </a:rPr>
+              <a:t>Draw on your own experience and career, and apply today's seminar to that setting.</a:t>
+            </a:r>
+            <a:endParaRPr lang="en-US" sz="2400" dirty="0"/>
+          </a:p>
+        </p:txBody>
+      </p:sp>
+      <p:sp>
+        <p:nvSpPr>
+          <p:cNvPr id="25" name="Slide Number Placeholder 0"/>
+          <p:cNvSpPr>
+            <a:spLocks noGrp="1"/>
+          </p:cNvSpPr>
+          <p:nvPr>
+            <p:ph type="sldNum" sz="quarter" idx="4294967295"/>
+          </p:nvPr>
+        </p:nvSpPr>
+        <p:spPr>
+          <a:xfrm>
+            <a:off x="10972800" y="6400800"/>
+            <a:ext cx="548640" cy="274320"/>
+          </a:xfrm>
+          <a:prstGeom prst="rect">
+            <a:avLst/>
+          </a:prstGeom>
+          <a:extLst>
+            <a:ext uri="{C572A759-6A51-4108-AA02-DFA0A04FC94B}">
+              <ma14:wrappingTextBoxFlag xmlns:ma14="http://schemas.microsoft.com/office/mac/drawingml/2011/main" val="0"/>
+            </a:ext>
+          </a:extLst>
+        </p:spPr>
+        <p:txBody>
+          <a:bodyPr/>
+          <a:lstStyle>
+            <a:lvl1pPr>
+              <a:defRPr sz="1000">
+                <a:solidFill>
+                  <a:srgbClr val="BFBFBF"/>
+                </a:solidFill>
+              </a:defRPr>
+            </a:lvl1pPr>
+          </a:lstStyle>
+          <a:p>
+            <a:pPr algn="r"/>
+            <a:fld id="{F7021451-1387-4CA6-816F-3879F97B5CBC}" type="slidenum">
+              <a:rPr b="0" lang="en-US"/>
+              <a:t>7</a:t>
             </a:fld>
             <a:endParaRPr lang="en-US"/>
           </a:p>

--- a/domain-seminars/week11_area_level_resources.pptx
+++ b/domain-seminars/week11_area_level_resources.pptx
@@ -1619,7 +1619,7 @@
                   <a:srgbClr val="FFFFFF"/>
                 </a:solidFill>
               </a:rPr>
-              <a:t>Area Level Resources and Spatial Analytics</a:t>
+              <a:t>Week 11: Area Level Resources and Spatial Analytics</a:t>
             </a:r>
             <a:endParaRPr lang="en-US" sz="4000" dirty="0"/>
           </a:p>
